--- a/docs/demo/HFM_RASAPI_demo.pptx
+++ b/docs/demo/HFM_RASAPI_demo.pptx
@@ -3914,7 +3914,7 @@
                 </a:solidFill>
                 <a:latin typeface="Calibri"/>
               </a:rPr>
-              <a:t>Fwd + reverse PLDM verified (rc=0)</a:t>
+              <a:t>Auto-discovery + fwd/reverse PLDM (rc=0)</a:t>
             </a:r>
           </a:p>
         </p:txBody>
@@ -4681,7 +4681,7 @@
                 </a:solidFill>
                 <a:latin typeface="Consolas"/>
               </a:rPr>
-              <a:t>Zephyr console:</a:t>
+              <a:t>Zephyr console (answered by the stock BMC pldmd, no manual responder):</a:t>
             </a:r>
           </a:p>
           <a:p>
@@ -4703,7 +4703,7 @@
                 </a:solidFill>
                 <a:latin typeface="Consolas"/>
               </a:rPr>
-              <a:t>&lt;inf&gt; serial_bridge: BMC GetTID -&gt; 0x08</a:t>
+              <a:t>&lt;inf&gt; serial_bridge: BMC GetTID -&gt; 0x01</a:t>
             </a:r>
           </a:p>
           <a:p>
@@ -4725,7 +4725,7 @@
                 </a:solidFill>
                 <a:latin typeface="Consolas"/>
               </a:rPr>
-              <a:t>&lt;inf&gt; serial_bridge: BMC GetPLDMTypes -&gt; byte0=0x01</a:t>
+              <a:t>&lt;inf&gt; serial_bridge: BMC GetPLDMTypes -&gt; byte0=0x1d</a:t>
             </a:r>
           </a:p>
           <a:p>
@@ -4747,7 +4747,7 @@
                 </a:solidFill>
                 <a:latin typeface="Consolas"/>
               </a:rPr>
-              <a:t>&lt;inf&gt; serial_bridge: BMC GetPLDMVersion(BASE) -&gt; 0.0.1</a:t>
+              <a:t>&lt;inf&gt; serial_bridge: BMC GetPLDMVersion(BASE) -&gt; 1.0.0</a:t>
             </a:r>
           </a:p>
           <a:p>
@@ -4770,28 +4770,6 @@
                 <a:latin typeface="Consolas"/>
               </a:rPr>
               <a:t>&lt;inf&gt; serial_bridge: Reverse-direction PLDM probe to BMC complete</a:t>
-            </a:r>
-          </a:p>
-          <a:p>
-            <a:pPr algn="l">
-              <a:lnSpc>
-                <a:spcPct val="106000"/>
-              </a:lnSpc>
-              <a:spcBef>
-                <a:spcPts val="0"/>
-              </a:spcBef>
-              <a:spcAft>
-                <a:spcPts val="600"/>
-              </a:spcAft>
-            </a:pPr>
-            <a:r>
-              <a:rPr sz="1350" b="0" i="0">
-                <a:solidFill>
-                  <a:srgbClr val="35C2D1"/>
-                </a:solidFill>
-                <a:latin typeface="Consolas"/>
-              </a:rPr>
-              <a:t>BMC responder: RX from EID 18 tag 0x08  (TO bit set) → rx=3 / tx=3</a:t>
             </a:r>
           </a:p>
         </p:txBody>
@@ -5040,7 +5018,7 @@
                 </a:solidFill>
                 <a:latin typeface="Calibri"/>
               </a:rPr>
-              <a:t>HONEST STATUS</a:t>
+              <a:t>FULL AUTO-DISCOVERY</a:t>
             </a:r>
           </a:p>
         </p:txBody>
@@ -5085,7 +5063,7 @@
                 </a:solidFill>
                 <a:latin typeface="Calibri"/>
               </a:rPr>
-              <a:t>Known limitation &amp; what actually ships</a:t>
+              <a:t>Three fixes that make mctpd self-discover at boot</a:t>
             </a:r>
           </a:p>
         </p:txBody>
@@ -5099,7 +5077,7 @@
         <p:spPr>
           <a:xfrm>
             <a:off x="640080" y="1554480"/>
-            <a:ext cx="10927080" cy="1965960"/>
+            <a:ext cx="10927080" cy="2286000"/>
           </a:xfrm>
           <a:prstGeom prst="rect">
             <a:avLst/>
@@ -5109,7 +5087,7 @@
           </a:solidFill>
           <a:ln w="12700">
             <a:solidFill>
-              <a:srgbClr val="F2A63B"/>
+              <a:srgbClr val="4CC96A"/>
             </a:solidFill>
           </a:ln>
           <a:effectLst/>
@@ -5172,11 +5150,11 @@
             <a:r>
               <a:rPr sz="1500" b="1" i="0">
                 <a:solidFill>
-                  <a:srgbClr val="F2A63B"/>
-                </a:solidFill>
-                <a:latin typeface="Calibri"/>
-              </a:rPr>
-              <a:t>mctpd fully-automatic discovery is blocked by a kernel bug (not our code)</a:t>
+                  <a:srgbClr val="4CC96A"/>
+                </a:solidFill>
+                <a:latin typeface="Calibri"/>
+              </a:rPr>
+              <a:t>Cold boot, zero manual steps — mctpd finds EID 18 on its own</a:t>
             </a:r>
           </a:p>
         </p:txBody>
@@ -5190,7 +5168,7 @@
         <p:spPr>
           <a:xfrm>
             <a:off x="868680" y="2103120"/>
-            <a:ext cx="10515600" cy="1371600"/>
+            <a:ext cx="10515600" cy="1691640"/>
           </a:xfrm>
           <a:prstGeom prst="rect">
             <a:avLst/>
@@ -5205,15 +5183,33 @@
           <a:p>
             <a:pPr algn="l">
               <a:lnSpc>
-                <a:spcPct val="112000"/>
-              </a:lnSpc>
-              <a:spcBef>
-                <a:spcPts val="0"/>
-              </a:spcBef>
-              <a:spcAft>
-                <a:spcPts val="600"/>
-              </a:spcAft>
-            </a:pPr>
+                <a:spcPct val="110000"/>
+              </a:lnSpc>
+              <a:spcBef>
+                <a:spcPts val="0"/>
+              </a:spcBef>
+              <a:spcAft>
+                <a:spcPts val="600"/>
+              </a:spcAft>
+            </a:pPr>
+            <a:r>
+              <a:rPr sz="1350" b="1" i="0">
+                <a:solidFill>
+                  <a:srgbClr val="35C2D1"/>
+                </a:solidFill>
+                <a:latin typeface="Calibri"/>
+              </a:rPr>
+              <a:t>1.  </a:t>
+            </a:r>
+            <a:r>
+              <a:rPr sz="1350" b="1" i="0">
+                <a:solidFill>
+                  <a:srgbClr val="35C2D1"/>
+                </a:solidFill>
+                <a:latin typeface="Calibri"/>
+              </a:rPr>
+              <a:t>Kernel (patch 0010): </a:t>
+            </a:r>
             <a:r>
               <a:rPr sz="1350" b="0" i="0">
                 <a:solidFill>
@@ -5221,21 +5217,39 @@
                 </a:solidFill>
                 <a:latin typeface="Calibri"/>
               </a:rPr>
-              <a:t>The BMC image kernel (6.6.92) has an AF_MCTP netlink-dump busy-loop: mctpd calls fill_linkmap() (RTM_GETLINK | NLM_F_DUMP) at startup, the dump spins, and the event loop never advances — so automatic SetupEndpoint never completes and the mctp route/addr CLI dump paths hang too.</a:t>
-            </a:r>
-          </a:p>
-          <a:p>
-            <a:pPr algn="l">
-              <a:lnSpc>
-                <a:spcPct val="112000"/>
-              </a:lnSpc>
-              <a:spcBef>
-                <a:spcPts val="0"/>
-              </a:spcBef>
-              <a:spcAft>
-                <a:spcPts val="600"/>
-              </a:spcAft>
-            </a:pPr>
+              <a:t>6.6.92's for_each_netdev_dump() used xa_for_each_start(), whose cursor never advances at end-of-walk — so the AF_MCTP address dump (mctp_dump_addrinfo) never emits NLMSG_DONE and mctpd spins at 100% CPU. Backport upstream cfa7fa02078d.</a:t>
+            </a:r>
+          </a:p>
+          <a:p>
+            <a:pPr algn="l">
+              <a:lnSpc>
+                <a:spcPct val="110000"/>
+              </a:lnSpc>
+              <a:spcBef>
+                <a:spcPts val="0"/>
+              </a:spcBef>
+              <a:spcAft>
+                <a:spcPts val="600"/>
+              </a:spcAft>
+            </a:pPr>
+            <a:r>
+              <a:rPr sz="1350" b="1" i="0">
+                <a:solidFill>
+                  <a:srgbClr val="35C2D1"/>
+                </a:solidFill>
+                <a:latin typeface="Calibri"/>
+              </a:rPr>
+              <a:t>2.  </a:t>
+            </a:r>
+            <a:r>
+              <a:rPr sz="1350" b="1" i="0">
+                <a:solidFill>
+                  <a:srgbClr val="35C2D1"/>
+                </a:solidFill>
+                <a:latin typeface="Calibri"/>
+              </a:rPr>
+              <a:t>Zephyr control responder (patch 0011): </a:t>
+            </a:r>
             <a:r>
               <a:rPr sz="1350" b="0" i="0">
                 <a:solidFill>
@@ -5243,7 +5257,47 @@
                 </a:solidFill>
                 <a:latin typeface="Calibri"/>
               </a:rPr>
-              <a:t>Workaround used in the demo: install the EID-18 route with a raw-netlink helper (RTM_NEWROUTE — sets, never dumps), then address EID 18 directly with pldmtool. Every command answers correctly over the real kernel transport.</a:t>
+              <a:t>control replies wrongly set TO = 1; the BMC kernel treats them as new requests and the mctpd physical-addressing discovery query times out. Reply with TO = 0.</a:t>
+            </a:r>
+          </a:p>
+          <a:p>
+            <a:pPr algn="l">
+              <a:lnSpc>
+                <a:spcPct val="110000"/>
+              </a:lnSpc>
+              <a:spcBef>
+                <a:spcPts val="0"/>
+              </a:spcBef>
+              <a:spcAft>
+                <a:spcPts val="600"/>
+              </a:spcAft>
+            </a:pPr>
+            <a:r>
+              <a:rPr sz="1350" b="1" i="0">
+                <a:solidFill>
+                  <a:srgbClr val="35C2D1"/>
+                </a:solidFill>
+                <a:latin typeface="Calibri"/>
+              </a:rPr>
+              <a:t>3.  </a:t>
+            </a:r>
+            <a:r>
+              <a:rPr sz="1350" b="1" i="0">
+                <a:solidFill>
+                  <a:srgbClr val="35C2D1"/>
+                </a:solidFill>
+                <a:latin typeface="Calibri"/>
+              </a:rPr>
+              <a:t>BMC systemd order (patch 0006): </a:t>
+            </a:r>
+            <a:r>
+              <a:rPr sz="1350" b="0" i="0">
+                <a:solidFill>
+                  <a:srgbClr val="F4F7FA"/>
+                </a:solidFill>
+                <a:latin typeface="Calibri"/>
+              </a:rPr>
+              <a:t>mctpd snapshots the link table once at startup, so the serial link must exist first. Split into mctp-local.service (Before mctpd) + mctp-setup-endpoint.service (After mctpd).</a:t>
             </a:r>
           </a:p>
         </p:txBody>
@@ -5256,8 +5310,8 @@
         </p:nvSpPr>
         <p:spPr>
           <a:xfrm>
-            <a:off x="640080" y="3703320"/>
-            <a:ext cx="10927080" cy="2057400"/>
+            <a:off x="640080" y="4023360"/>
+            <a:ext cx="10927080" cy="1737360"/>
           </a:xfrm>
           <a:prstGeom prst="rect">
             <a:avLst/>
@@ -5300,7 +5354,7 @@
         </p:nvSpPr>
         <p:spPr>
           <a:xfrm>
-            <a:off x="868680" y="3813048"/>
+            <a:off x="868680" y="4133087"/>
             <a:ext cx="10515600" cy="365760"/>
           </a:xfrm>
           <a:prstGeom prst="rect">
@@ -5332,7 +5386,7 @@
                 </a:solidFill>
                 <a:latin typeface="Calibri"/>
               </a:rPr>
-              <a:t>What is proven vs. what awaits an upstream kernel fix</a:t>
+              <a:t>Verified end to end on a from-recipe rebuild</a:t>
             </a:r>
           </a:p>
         </p:txBody>
@@ -5345,8 +5399,8 @@
         </p:nvSpPr>
         <p:spPr>
           <a:xfrm>
-            <a:off x="868680" y="4251960"/>
-            <a:ext cx="10515600" cy="1463040"/>
+            <a:off x="868680" y="4572000"/>
+            <a:ext cx="10515600" cy="1188720"/>
           </a:xfrm>
           <a:prstGeom prst="rect">
             <a:avLst/>
@@ -5386,7 +5440,7 @@
                 </a:solidFill>
                 <a:latin typeface="Calibri"/>
               </a:rPr>
-              <a:t>PLDM Type 0/2 responders + MCTP control responder — correct over real AF_MCTP</a:t>
+              <a:t>mctp-local → mctpd → mctp-setup-endpoint all active; SetupEndpoint succeeds, endpoints/18 published on D-Bus</a:t>
             </a:r>
           </a:p>
           <a:p>
@@ -5417,7 +5471,7 @@
                 </a:solidFill>
                 <a:latin typeface="Calibri"/>
               </a:rPr>
-              <a:t>Forward discovery/polling and reverse-path requester (patch 0009) — both verified</a:t>
+              <a:t>mctpd auto-installs the kernel route (eid 18 dev mctpserial0); forward pldmtool GetTID/PDR/Sensor all rc=0</a:t>
             </a:r>
           </a:p>
           <a:p>
@@ -5448,38 +5502,7 @@
                 </a:solidFill>
                 <a:latin typeface="Calibri"/>
               </a:rPr>
-              <a:t>QEMU 11 + Zephyr rebuilt from source; OpenBMC bitbake reproduces c775fa9</a:t>
-            </a:r>
-          </a:p>
-          <a:p>
-            <a:pPr algn="l">
-              <a:lnSpc>
-                <a:spcPct val="116000"/>
-              </a:lnSpc>
-              <a:spcBef>
-                <a:spcPts val="0"/>
-              </a:spcBef>
-              <a:spcAft>
-                <a:spcPts val="600"/>
-              </a:spcAft>
-            </a:pPr>
-            <a:r>
-              <a:rPr sz="1400" b="1" i="0">
-                <a:solidFill>
-                  <a:srgbClr val="F2A63B"/>
-                </a:solidFill>
-                <a:latin typeface="Calibri"/>
-              </a:rPr>
-              <a:t>○  </a:t>
-            </a:r>
-            <a:r>
-              <a:rPr sz="1400" b="0" i="0">
-                <a:solidFill>
-                  <a:srgbClr val="B8C4D0"/>
-                </a:solidFill>
-                <a:latin typeface="Calibri"/>
-              </a:rPr>
-              <a:t>Hands-off mctpd self-discovery — needs a kernel with a working AF_MCTP dump</a:t>
+              <a:t>Reverse probe (patch 0009) completes on its own — answered by the stock pldmd, no manual responder</a:t>
             </a:r>
           </a:p>
         </p:txBody>
@@ -6448,7 +6471,7 @@
                 </a:solidFill>
                 <a:latin typeface="Calibri"/>
               </a:rPr>
-              <a:t>forward pldmtool + start responder</a:t>
+              <a:t>observe auto-route + forward pldmtool</a:t>
             </a:r>
           </a:p>
         </p:txBody>
@@ -8524,7 +8547,7 @@
                 </a:solidFill>
                 <a:latin typeface="Calibri"/>
               </a:rPr>
-              <a:t>Known limitation &amp; wrap-up</a:t>
+              <a:t>Full auto-discovery — three fixes &amp; wrap-up</a:t>
             </a:r>
           </a:p>
         </p:txBody>
@@ -8569,7 +8592,7 @@
                 </a:solidFill>
                 <a:latin typeface="Calibri"/>
               </a:rPr>
-              <a:t>mctpd auto-discovery kernel busy-loop; what ships in RASAPI</a:t>
+              <a:t>kernel busy-loop (0010) + control TO bit (0011) + systemd order (0006)</a:t>
             </a:r>
           </a:p>
         </p:txBody>
@@ -10510,7 +10533,7 @@
                 </a:solidFill>
                 <a:latin typeface="Calibri"/>
               </a:rPr>
-              <a:t>Delivered as numbered patches 0001–0009 under patches/ — full apply order in patches/README.md</a:t>
+              <a:t>Delivered as numbered patches 0001–0011 under patches/ — full apply order in patches/README.md</a:t>
             </a:r>
           </a:p>
         </p:txBody>
@@ -12661,7 +12684,7 @@
                 </a:solidFill>
                 <a:latin typeface="Calibri"/>
               </a:rPr>
-              <a:t>OpenBMC image</a:t>
+              <a:t>OpenBMC image (+0004/6/10)</a:t>
             </a:r>
           </a:p>
         </p:txBody>
@@ -12751,7 +12774,7 @@
                 </a:solidFill>
                 <a:latin typeface="Consolas"/>
               </a:rPr>
-              <a:t>md5 c775fa9</a:t>
+              <a:t>md5 9a858c13</a:t>
             </a:r>
           </a:p>
         </p:txBody>
@@ -12842,7 +12865,7 @@
                 </a:solidFill>
                 <a:latin typeface="Calibri"/>
               </a:rPr>
-              <a:t>Zephyr ELF (+0009)</a:t>
+              <a:t>Zephyr ELF (+0009/0011)</a:t>
             </a:r>
           </a:p>
         </p:txBody>
@@ -12887,7 +12910,7 @@
                 </a:solidFill>
                 <a:latin typeface="Consolas"/>
               </a:rPr>
-              <a:t>build-serial-0009/zephyr/zephyr.elf</a:t>
+              <a:t>build-serial-fix/zephyr/zephyr.elf</a:t>
             </a:r>
           </a:p>
         </p:txBody>
@@ -12932,7 +12955,7 @@
                 </a:solidFill>
                 <a:latin typeface="Consolas"/>
               </a:rPr>
-              <a:t>md5 14b701bc</a:t>
+              <a:t>md5 dd56e8fe</a:t>
             </a:r>
           </a:p>
         </p:txBody>
@@ -13249,7 +13272,7 @@
                 </a:solidFill>
                 <a:latin typeface="Consolas"/>
               </a:rPr>
-              <a:t>/tmp/run_pldm3.sh  →  /tmp/pldm_comm_test3.out</a:t>
+              <a:t>launch_openbmc.sh / launch_hfm.sh</a:t>
             </a:r>
           </a:p>
         </p:txBody>
@@ -13294,7 +13317,7 @@
                 </a:solidFill>
                 <a:latin typeface="Consolas"/>
               </a:rPr>
-              <a:t>PYTHON_EXIT=0</a:t>
+              <a:t>cold-boot auto-discovery</a:t>
             </a:r>
           </a:p>
         </p:txBody>
@@ -14618,7 +14641,7 @@
                 </a:solidFill>
                 <a:latin typeface="Calibri"/>
               </a:rPr>
-              <a:t>forward + reverse prep</a:t>
+              <a:t>observe auto-route + forward</a:t>
             </a:r>
           </a:p>
         </p:txBody>
@@ -14751,29 +14774,29 @@
                 </a:solidFill>
                 <a:latin typeface="Consolas"/>
               </a:rPr>
+              <a:t># auto-discovered route</a:t>
+            </a:r>
+          </a:p>
+          <a:p>
+            <a:pPr algn="l">
+              <a:lnSpc>
+                <a:spcPct val="125000"/>
+              </a:lnSpc>
+              <a:spcBef>
+                <a:spcPts val="0"/>
+              </a:spcBef>
+              <a:spcAft>
+                <a:spcPts val="600"/>
+              </a:spcAft>
+            </a:pPr>
+            <a:r>
+              <a:rPr sz="1250" b="0" i="0">
+                <a:solidFill>
+                  <a:srgbClr val="B8C4D0"/>
+                </a:solidFill>
+                <a:latin typeface="Consolas"/>
+              </a:rPr>
               <a:t># forward pldmtool</a:t>
-            </a:r>
-          </a:p>
-          <a:p>
-            <a:pPr algn="l">
-              <a:lnSpc>
-                <a:spcPct val="125000"/>
-              </a:lnSpc>
-              <a:spcBef>
-                <a:spcPts val="0"/>
-              </a:spcBef>
-              <a:spcAft>
-                <a:spcPts val="600"/>
-              </a:spcAft>
-            </a:pPr>
-            <a:r>
-              <a:rPr sz="1250" b="0" i="0">
-                <a:solidFill>
-                  <a:srgbClr val="B8C4D0"/>
-                </a:solidFill>
-                <a:latin typeface="Consolas"/>
-              </a:rPr>
-              <a:t># starts EID 8 responder</a:t>
             </a:r>
           </a:p>
         </p:txBody>
@@ -15715,7 +15738,7 @@
                 </a:solidFill>
                 <a:latin typeface="Consolas"/>
               </a:rPr>
-              <a:t>  ^ retries until T3 brings the link up</a:t>
+              <a:t>  ^ retries until mctpd auto-discovers</a:t>
             </a:r>
           </a:p>
         </p:txBody>
@@ -15804,7 +15827,7 @@
                 </a:solidFill>
                 <a:latin typeface="Calibri"/>
               </a:rPr>
-              <a:t>  normal until the BMC link + responder come up in T3.</a:t>
+              <a:t>  normal until mctpd finishes auto-discovery (SetupEndpoint).</a:t>
             </a:r>
           </a:p>
           <a:p>
@@ -15826,7 +15849,7 @@
                 </a:solidFill>
                 <a:latin typeface="Calibri"/>
               </a:rPr>
-              <a:t>• Keep this terminal in view for the reverse-path result.</a:t>
+              <a:t>• Then the reverse probe completes on its own — watch here.</a:t>
             </a:r>
           </a:p>
         </p:txBody>
@@ -16211,6 +16234,50 @@
                 </a:solidFill>
                 <a:latin typeface="Consolas"/>
               </a:rPr>
+              <a:t>BMC# mctp route          # installed by mctpd, not by hand</a:t>
+            </a:r>
+          </a:p>
+          <a:p>
+            <a:pPr algn="l">
+              <a:lnSpc>
+                <a:spcPct val="105000"/>
+              </a:lnSpc>
+              <a:spcBef>
+                <a:spcPts val="0"/>
+              </a:spcBef>
+              <a:spcAft>
+                <a:spcPts val="600"/>
+              </a:spcAft>
+            </a:pPr>
+            <a:r>
+              <a:rPr sz="1400" b="0" i="0">
+                <a:solidFill>
+                  <a:srgbClr val="4CC96A"/>
+                </a:solidFill>
+                <a:latin typeface="Consolas"/>
+              </a:rPr>
+              <a:t>        eid min 18 max 18 net 1 dev mctpserial0 mtu 68</a:t>
+            </a:r>
+          </a:p>
+          <a:p>
+            <a:pPr algn="l">
+              <a:lnSpc>
+                <a:spcPct val="105000"/>
+              </a:lnSpc>
+              <a:spcBef>
+                <a:spcPts val="0"/>
+              </a:spcBef>
+              <a:spcAft>
+                <a:spcPts val="600"/>
+              </a:spcAft>
+            </a:pPr>
+            <a:r>
+              <a:rPr sz="1450" b="0" i="0">
+                <a:solidFill>
+                  <a:srgbClr val="35C2D1"/>
+                </a:solidFill>
+                <a:latin typeface="Consolas"/>
+              </a:rPr>
               <a:t>BMC# pldmtool base GetTID -m 18</a:t>
             </a:r>
           </a:p>
@@ -16278,50 +16345,6 @@
                 <a:latin typeface="Consolas"/>
               </a:rPr>
               <a:t>        GetPLDMTypes rc=0      →  base(0) + platform(2)</a:t>
-            </a:r>
-          </a:p>
-          <a:p>
-            <a:pPr algn="l">
-              <a:lnSpc>
-                <a:spcPct val="105000"/>
-              </a:lnSpc>
-              <a:spcBef>
-                <a:spcPts val="0"/>
-              </a:spcBef>
-              <a:spcAft>
-                <a:spcPts val="600"/>
-              </a:spcAft>
-            </a:pPr>
-            <a:r>
-              <a:rPr sz="1450" b="0" i="0">
-                <a:solidFill>
-                  <a:srgbClr val="35C2D1"/>
-                </a:solidFill>
-                <a:latin typeface="Consolas"/>
-              </a:rPr>
-              <a:t>BMC# pldmtool base GetPLDMVersion -m 18 -t 0</a:t>
-            </a:r>
-          </a:p>
-          <a:p>
-            <a:pPr algn="l">
-              <a:lnSpc>
-                <a:spcPct val="105000"/>
-              </a:lnSpc>
-              <a:spcBef>
-                <a:spcPts val="0"/>
-              </a:spcBef>
-              <a:spcAft>
-                <a:spcPts val="600"/>
-              </a:spcAft>
-            </a:pPr>
-            <a:r>
-              <a:rPr sz="1400" b="0" i="0">
-                <a:solidFill>
-                  <a:srgbClr val="4CC96A"/>
-                </a:solidFill>
-                <a:latin typeface="Consolas"/>
-              </a:rPr>
-              <a:t>        GetPLDMVersion rc=0    →  1.1.0</a:t>
             </a:r>
           </a:p>
           <a:p>
@@ -16448,13 +16471,13 @@
               </a:spcAft>
             </a:pPr>
             <a:r>
-              <a:rPr sz="1400" b="0" i="0">
+              <a:rPr sz="1350" b="0" i="0">
                 <a:solidFill>
                   <a:srgbClr val="F4F7FA"/>
                 </a:solidFill>
                 <a:latin typeface="Calibri"/>
               </a:rPr>
-              <a:t>drive_bmc_pldm.sh runs these over SSH — the REAL OpenBMC kernel AF_MCTP stack + pldmtool.</a:t>
+              <a:t>mctpd auto-installed the EID-18 route (no manual route add); drive_bmc_pldm.sh then polls over the REAL kernel AF_MCTP stack.</a:t>
             </a:r>
           </a:p>
         </p:txBody>
